--- a/lecons/USA/Population Geography/23_USA_POP_FS01_Population_Change_in_Cameroon.pptx
+++ b/lecons/USA/Population Geography/23_USA_POP_FS01_Population_Change_in_Cameroon.pptx
@@ -3460,7 +3460,7 @@
           <a:p>
             <a:r>
               <a:rPr lang="en-US" dirty="0"/>
-              <a:t>Before we start the new lesson, let us correct the homework I gave you at the end of Lesson 18: Theories of Population and Resources: Malthus and Boserup. The question was: Write a debate: "Population growth is a problem for Cameroon." Give two arguments for and two against. Take out your exercise books.</a:t>
+              <a:t>Before we start the new lesson, let us correct the homework I gave you at the end of Lesson 18: Theories of Population and Resources: Malthus and Boserup. The question was: State the population of Cameroon at the 2005 census. Take out your exercise books.</a:t>
             </a:r>
             <a:endParaRPr lang="en-US" dirty="0"/>
           </a:p>
@@ -4340,7 +4340,7 @@
           <a:p>
             <a:r>
               <a:rPr lang="en-US" dirty="0"/>
-              <a:t>For your homework: Draw a map of Cameroon showing dense and sparse regions and the main migration flows. We shall correct it at the beginning of our next lesson.</a:t>
+              <a:t>For your homework: Define a settlement. We shall correct it at the beginning of our next lesson.</a:t>
             </a:r>
             <a:endParaRPr lang="en-US" dirty="0"/>
           </a:p>
@@ -4428,7 +4428,7 @@
           <a:p>
             <a:r>
               <a:rPr lang="en-US" dirty="0"/>
-              <a:t>Here is a good answer. For: rapid growth strains land, schools, jobs and forests (Malthus). Against: a growing population is a larger workforce and market, and pressure encourages innovation such as irrigation and terraces (Boserup). Compare it with your own answer and correct your work in red.</a:t>
+              <a:t>Here is a good answer. 17,463,836 people (about 17.5 million). Compare it with your own answer and correct your work in red.</a:t>
             </a:r>
             <a:endParaRPr lang="en-US" dirty="0"/>
           </a:p>
@@ -14980,7 +14980,7 @@
         <p:spPr>
           <a:xfrm>
             <a:off x="0" y="658368"/>
-            <a:ext cx="3840480" cy="5833872"/>
+            <a:ext cx="5120640" cy="5833872"/>
           </a:xfrm>
           <a:prstGeom prst="rect">
             <a:avLst/>
@@ -14995,8 +14995,8 @@
         </p:nvSpPr>
         <p:spPr>
           <a:xfrm>
-            <a:off x="4069080" y="1005840"/>
-            <a:ext cx="7802575" cy="731520"/>
+            <a:off x="5349240" y="1005840"/>
+            <a:ext cx="6522415" cy="731520"/>
           </a:xfrm>
           <a:prstGeom prst="rect">
             <a:avLst/>
@@ -15036,8 +15036,8 @@
         </p:nvSpPr>
         <p:spPr>
           <a:xfrm>
-            <a:off x="4069080" y="1783080"/>
-            <a:ext cx="7802575" cy="4663440"/>
+            <a:off x="5349240" y="1783080"/>
+            <a:ext cx="6522415" cy="4663440"/>
           </a:xfrm>
           <a:prstGeom prst="rect">
             <a:avLst/>
@@ -15084,7 +15084,7 @@
                 <a:ea typeface="Times New Roman" pitchFamily="34" charset="-122"/>
                 <a:cs typeface="Times New Roman" pitchFamily="34" charset="-120"/>
               </a:rPr>
-              <a:t>Write a debate: "Population growth is a problem for Cameroon." Give two arguments for and two against.</a:t>
+              <a:t>State the population of Cameroon at the 2005 census.</a:t>
             </a:r>
             <a:endParaRPr lang="en-US" sz="4000" dirty="0"/>
           </a:p>
@@ -17384,7 +17384,7 @@
                 <a:ea typeface="Times New Roman" pitchFamily="34" charset="-122"/>
                 <a:cs typeface="Times New Roman" pitchFamily="34" charset="-120"/>
               </a:rPr>
-              <a:t>Draw a map of Cameroon showing dense and sparse regions and the main migration flows.</a:t>
+              <a:t>Define a settlement.</a:t>
             </a:r>
             <a:endParaRPr lang="en-US" sz="4000" dirty="0"/>
           </a:p>
@@ -17519,7 +17519,7 @@
         <p:spPr>
           <a:xfrm>
             <a:off x="0" y="658368"/>
-            <a:ext cx="3840480" cy="5833872"/>
+            <a:ext cx="5120640" cy="5833872"/>
           </a:xfrm>
           <a:prstGeom prst="rect">
             <a:avLst/>
@@ -17534,8 +17534,8 @@
         </p:nvSpPr>
         <p:spPr>
           <a:xfrm>
-            <a:off x="4069080" y="1005840"/>
-            <a:ext cx="7802575" cy="731520"/>
+            <a:off x="5349240" y="1005840"/>
+            <a:ext cx="6522415" cy="731520"/>
           </a:xfrm>
           <a:prstGeom prst="rect">
             <a:avLst/>
@@ -17575,8 +17575,8 @@
         </p:nvSpPr>
         <p:spPr>
           <a:xfrm>
-            <a:off x="4069080" y="1783080"/>
-            <a:ext cx="7802575" cy="4663440"/>
+            <a:off x="5349240" y="1783080"/>
+            <a:ext cx="6522415" cy="4663440"/>
           </a:xfrm>
           <a:prstGeom prst="rect">
             <a:avLst/>
@@ -17603,7 +17603,7 @@
                 <a:ea typeface="Times New Roman" pitchFamily="34" charset="-122"/>
                 <a:cs typeface="Times New Roman" pitchFamily="34" charset="-120"/>
               </a:rPr>
-              <a:t>For: rapid growth strains land, schools, jobs and forests (Malthus). Against: a growing population is a larger workforce and market, and pressure encourages innovation such as irrigation and terraces (Boserup).</a:t>
+              <a:t>17,463,836 people (about 17.5 million).</a:t>
             </a:r>
             <a:endParaRPr lang="en-US" sz="4000" dirty="0"/>
           </a:p>
@@ -20267,7 +20267,7 @@
                           <a:ea typeface="Calibri" pitchFamily="34" charset="-122"/>
                           <a:cs typeface="Calibri" pitchFamily="34" charset="-120"/>
                         </a:rPr>
-                        <a:t>Draw a map of Cameroon showing dense and sparse regions and the main migration flows.</a:t>
+                        <a:t>Define a settlement.</a:t>
                       </a:r>
                       <a:endParaRPr lang="en-US" sz="1600" dirty="0">
                         <a:latin typeface="Calibri" charset="0"/>
